--- a/dist/초6/사회·역사/현대사회와평화/초6_사회·역사_현대사회와평화_02_산업화와생활변화_학생용.pptx
+++ b/dist/초6/사회·역사/현대사회와평화/초6_사회·역사_현대사회와평화_02_산업화와생활변화_학생용.pptx
@@ -120,13 +120,13 @@
   <p:extLst>
     <p:ext uri="{521415D9-36F7-43E2-AB2F-B90AF26B5E84}">
       <p14:sectionLst xmlns:p14="http://schemas.microsoft.com/office/powerpoint/2010/main">
-        <p14:section name="도입" id="{f78ae5a9-fe7d-61c9-cffb-c7926f94e4ae}">
+        <p14:section name="도입" id="{e5dbf76d-d4a0-c4e8-9e85-cf51712e6113}">
           <p14:sldIdLst>
             <p14:sldId id="256"/>
             <p14:sldId id="257"/>
           </p14:sldIdLst>
         </p14:section>
-        <p14:section name="개념" id="{7b3d935e-9667-c5ea-1b7a-a749e5eef39c}">
+        <p14:section name="개념" id="{a1580697-52f2-4be9-243f-0ec891784dc8}">
           <p14:sldIdLst>
             <p14:sldId id="258"/>
             <p14:sldId id="259"/>
@@ -134,7 +134,7 @@
             <p14:sldId id="264"/>
           </p14:sldIdLst>
         </p14:section>
-        <p14:section name="연습" id="{838d054c-c86d-3380-9f25-50f956adb5b8}">
+        <p14:section name="연습" id="{05f239a9-4d19-6087-73f7-db33f057efd9}">
           <p14:sldIdLst>
             <p14:sldId id="260"/>
             <p14:sldId id="261"/>
@@ -143,29 +143,29 @@
             <p14:sldId id="266"/>
           </p14:sldIdLst>
         </p14:section>
-        <p14:section name="개념" id="{afdc7f1e-4c05-ac66-9c0b-210d8132818e}">
+        <p14:section name="개념" id="{3f64a324-b904-af12-fa56-599d8ad83338}">
           <p14:sldIdLst/>
         </p14:section>
-        <p14:section name="연습" id="{1c70e5a4-c99d-5066-e29f-27f2982cd00a}">
+        <p14:section name="연습" id="{360d9dbb-f059-4631-0774-7094dfbf58b5}">
           <p14:sldIdLst/>
         </p14:section>
-        <p14:section name="개념" id="{dc388dc8-57ac-c8a6-81f4-28b6c3eae208}">
+        <p14:section name="개념" id="{ff204334-76c3-aaab-8204-c6618b56c82c}">
           <p14:sldIdLst/>
         </p14:section>
-        <p14:section name="연습" id="{9b41f2ef-6be9-3db1-e79f-49ee53947a5d}">
+        <p14:section name="연습" id="{3c3bc49a-417c-3182-ff5d-685d9022fae7}">
           <p14:sldIdLst/>
         </p14:section>
-        <p14:section name="확인" id="{663169d6-18f2-34b1-808c-cbff17679e7e}">
+        <p14:section name="확인" id="{3c5a8c85-cb80-e596-4f1f-24ce4511ccf8}">
           <p14:sldIdLst>
             <p14:sldId id="267"/>
           </p14:sldIdLst>
         </p14:section>
-        <p14:section name="정리" id="{052011c9-69af-1d9f-6025-ec09846dec74}">
+        <p14:section name="정리" id="{20301a30-8a44-5edd-bb7f-424c72c7f2d5}">
           <p14:sldIdLst>
             <p14:sldId id="268"/>
           </p14:sldIdLst>
         </p14:section>
-        <p14:section name="보충" id="{3e9edf70-b885-6e27-caad-f6f79403c0f0}">
+        <p14:section name="보충" id="{a7981f4a-a9d0-7bf2-8ef9-193eb43bca38}">
           <p14:sldIdLst>
             <p14:sldId id="269"/>
           </p14:sldIdLst>
